--- a/Presentation/Презентація_Кір_у_дітей.pptx
+++ b/Presentation/Презентація_Кір_у_дітей.pptx
@@ -3308,6 +3308,30 @@
           </a:p>
         </p:txBody>
       </p:sp>
+      <p:pic>
+        <p:nvPicPr>
+          <p:cNvPr id="4" name="Picture 3" descr="slide_01.jpg"/>
+          <p:cNvPicPr>
+            <a:picLocks noChangeAspect="1"/>
+          </p:cNvPicPr>
+          <p:nvPr/>
+        </p:nvPicPr>
+        <p:blipFill>
+          <a:blip r:embed="rId2"/>
+          <a:stretch>
+            <a:fillRect/>
+          </a:stretch>
+        </p:blipFill>
+        <p:spPr>
+          <a:xfrm>
+            <a:off x="5623560" y="3611880"/>
+            <a:ext cx="3246120" cy="2423160"/>
+          </a:xfrm>
+          <a:prstGeom prst="rect">
+            <a:avLst/>
+          </a:prstGeom>
+        </p:spPr>
+      </p:pic>
     </p:spTree>
   </p:cSld>
   <p:clrMapOvr>
@@ -3394,6 +3418,30 @@
           </a:p>
         </p:txBody>
       </p:sp>
+      <p:pic>
+        <p:nvPicPr>
+          <p:cNvPr id="4" name="Picture 3" descr="slide_10.jpg"/>
+          <p:cNvPicPr>
+            <a:picLocks noChangeAspect="1"/>
+          </p:cNvPicPr>
+          <p:nvPr/>
+        </p:nvPicPr>
+        <p:blipFill>
+          <a:blip r:embed="rId2"/>
+          <a:stretch>
+            <a:fillRect/>
+          </a:stretch>
+        </p:blipFill>
+        <p:spPr>
+          <a:xfrm>
+            <a:off x="5623560" y="3611880"/>
+            <a:ext cx="3246120" cy="2423160"/>
+          </a:xfrm>
+          <a:prstGeom prst="rect">
+            <a:avLst/>
+          </a:prstGeom>
+        </p:spPr>
+      </p:pic>
     </p:spTree>
   </p:cSld>
   <p:clrMapOvr>
@@ -3496,6 +3544,30 @@
           </a:p>
         </p:txBody>
       </p:sp>
+      <p:pic>
+        <p:nvPicPr>
+          <p:cNvPr id="4" name="Picture 3" descr="slide_05.jpg"/>
+          <p:cNvPicPr>
+            <a:picLocks noChangeAspect="1"/>
+          </p:cNvPicPr>
+          <p:nvPr/>
+        </p:nvPicPr>
+        <p:blipFill>
+          <a:blip r:embed="rId2"/>
+          <a:stretch>
+            <a:fillRect/>
+          </a:stretch>
+        </p:blipFill>
+        <p:spPr>
+          <a:xfrm>
+            <a:off x="5623560" y="3611880"/>
+            <a:ext cx="3246120" cy="2423160"/>
+          </a:xfrm>
+          <a:prstGeom prst="rect">
+            <a:avLst/>
+          </a:prstGeom>
+        </p:spPr>
+      </p:pic>
     </p:spTree>
   </p:cSld>
   <p:clrMapOvr>
@@ -3594,6 +3666,30 @@
           </a:p>
         </p:txBody>
       </p:sp>
+      <p:pic>
+        <p:nvPicPr>
+          <p:cNvPr id="4" name="Picture 3" descr="slide_06.jpg"/>
+          <p:cNvPicPr>
+            <a:picLocks noChangeAspect="1"/>
+          </p:cNvPicPr>
+          <p:nvPr/>
+        </p:nvPicPr>
+        <p:blipFill>
+          <a:blip r:embed="rId2"/>
+          <a:stretch>
+            <a:fillRect/>
+          </a:stretch>
+        </p:blipFill>
+        <p:spPr>
+          <a:xfrm>
+            <a:off x="5623560" y="3611880"/>
+            <a:ext cx="3246120" cy="2423160"/>
+          </a:xfrm>
+          <a:prstGeom prst="rect">
+            <a:avLst/>
+          </a:prstGeom>
+        </p:spPr>
+      </p:pic>
     </p:spTree>
   </p:cSld>
   <p:clrMapOvr>
@@ -3688,6 +3784,30 @@
           </a:p>
         </p:txBody>
       </p:sp>
+      <p:pic>
+        <p:nvPicPr>
+          <p:cNvPr id="4" name="Picture 3" descr="slide_13.jpg"/>
+          <p:cNvPicPr>
+            <a:picLocks noChangeAspect="1"/>
+          </p:cNvPicPr>
+          <p:nvPr/>
+        </p:nvPicPr>
+        <p:blipFill>
+          <a:blip r:embed="rId2"/>
+          <a:stretch>
+            <a:fillRect/>
+          </a:stretch>
+        </p:blipFill>
+        <p:spPr>
+          <a:xfrm>
+            <a:off x="5623560" y="3611880"/>
+            <a:ext cx="3246120" cy="2423160"/>
+          </a:xfrm>
+          <a:prstGeom prst="rect">
+            <a:avLst/>
+          </a:prstGeom>
+        </p:spPr>
+      </p:pic>
     </p:spTree>
   </p:cSld>
   <p:clrMapOvr>
@@ -3788,6 +3908,30 @@
           </a:p>
         </p:txBody>
       </p:sp>
+      <p:pic>
+        <p:nvPicPr>
+          <p:cNvPr id="4" name="Picture 3" descr="slide_14.jpg"/>
+          <p:cNvPicPr>
+            <a:picLocks noChangeAspect="1"/>
+          </p:cNvPicPr>
+          <p:nvPr/>
+        </p:nvPicPr>
+        <p:blipFill>
+          <a:blip r:embed="rId2"/>
+          <a:stretch>
+            <a:fillRect/>
+          </a:stretch>
+        </p:blipFill>
+        <p:spPr>
+          <a:xfrm>
+            <a:off x="5623560" y="3611880"/>
+            <a:ext cx="3246120" cy="2423160"/>
+          </a:xfrm>
+          <a:prstGeom prst="rect">
+            <a:avLst/>
+          </a:prstGeom>
+        </p:spPr>
+      </p:pic>
     </p:spTree>
   </p:cSld>
   <p:clrMapOvr>
@@ -3882,6 +4026,30 @@
           </a:p>
         </p:txBody>
       </p:sp>
+      <p:pic>
+        <p:nvPicPr>
+          <p:cNvPr id="4" name="Picture 3" descr="slide_15.jpg"/>
+          <p:cNvPicPr>
+            <a:picLocks noChangeAspect="1"/>
+          </p:cNvPicPr>
+          <p:nvPr/>
+        </p:nvPicPr>
+        <p:blipFill>
+          <a:blip r:embed="rId2"/>
+          <a:stretch>
+            <a:fillRect/>
+          </a:stretch>
+        </p:blipFill>
+        <p:spPr>
+          <a:xfrm>
+            <a:off x="5623560" y="3611880"/>
+            <a:ext cx="3246120" cy="2423160"/>
+          </a:xfrm>
+          <a:prstGeom prst="rect">
+            <a:avLst/>
+          </a:prstGeom>
+        </p:spPr>
+      </p:pic>
     </p:spTree>
   </p:cSld>
   <p:clrMapOvr>
@@ -3990,6 +4158,30 @@
           </a:p>
         </p:txBody>
       </p:sp>
+      <p:pic>
+        <p:nvPicPr>
+          <p:cNvPr id="4" name="Picture 3" descr="slide_13.jpg"/>
+          <p:cNvPicPr>
+            <a:picLocks noChangeAspect="1"/>
+          </p:cNvPicPr>
+          <p:nvPr/>
+        </p:nvPicPr>
+        <p:blipFill>
+          <a:blip r:embed="rId2"/>
+          <a:stretch>
+            <a:fillRect/>
+          </a:stretch>
+        </p:blipFill>
+        <p:spPr>
+          <a:xfrm>
+            <a:off x="5623560" y="3611880"/>
+            <a:ext cx="3246120" cy="2423160"/>
+          </a:xfrm>
+          <a:prstGeom prst="rect">
+            <a:avLst/>
+          </a:prstGeom>
+        </p:spPr>
+      </p:pic>
     </p:spTree>
   </p:cSld>
   <p:clrMapOvr>
@@ -4100,6 +4292,30 @@
           </a:p>
         </p:txBody>
       </p:sp>
+      <p:pic>
+        <p:nvPicPr>
+          <p:cNvPr id="4" name="Picture 3" descr="slide_17.jpg"/>
+          <p:cNvPicPr>
+            <a:picLocks noChangeAspect="1"/>
+          </p:cNvPicPr>
+          <p:nvPr/>
+        </p:nvPicPr>
+        <p:blipFill>
+          <a:blip r:embed="rId2"/>
+          <a:stretch>
+            <a:fillRect/>
+          </a:stretch>
+        </p:blipFill>
+        <p:spPr>
+          <a:xfrm>
+            <a:off x="5623560" y="3611880"/>
+            <a:ext cx="3246120" cy="2423160"/>
+          </a:xfrm>
+          <a:prstGeom prst="rect">
+            <a:avLst/>
+          </a:prstGeom>
+        </p:spPr>
+      </p:pic>
     </p:spTree>
   </p:cSld>
   <p:clrMapOvr>
@@ -4202,6 +4418,30 @@
           </a:p>
         </p:txBody>
       </p:sp>
+      <p:pic>
+        <p:nvPicPr>
+          <p:cNvPr id="4" name="Picture 3" descr="slide_03.jpg"/>
+          <p:cNvPicPr>
+            <a:picLocks noChangeAspect="1"/>
+          </p:cNvPicPr>
+          <p:nvPr/>
+        </p:nvPicPr>
+        <p:blipFill>
+          <a:blip r:embed="rId2"/>
+          <a:stretch>
+            <a:fillRect/>
+          </a:stretch>
+        </p:blipFill>
+        <p:spPr>
+          <a:xfrm>
+            <a:off x="5623560" y="3611880"/>
+            <a:ext cx="3246120" cy="2423160"/>
+          </a:xfrm>
+          <a:prstGeom prst="rect">
+            <a:avLst/>
+          </a:prstGeom>
+        </p:spPr>
+      </p:pic>
     </p:spTree>
   </p:cSld>
   <p:clrMapOvr>
@@ -4296,6 +4536,30 @@
           </a:p>
         </p:txBody>
       </p:sp>
+      <p:pic>
+        <p:nvPicPr>
+          <p:cNvPr id="4" name="Picture 3" descr="slide_19.jpg"/>
+          <p:cNvPicPr>
+            <a:picLocks noChangeAspect="1"/>
+          </p:cNvPicPr>
+          <p:nvPr/>
+        </p:nvPicPr>
+        <p:blipFill>
+          <a:blip r:embed="rId2"/>
+          <a:stretch>
+            <a:fillRect/>
+          </a:stretch>
+        </p:blipFill>
+        <p:spPr>
+          <a:xfrm>
+            <a:off x="5623560" y="3611880"/>
+            <a:ext cx="3246120" cy="2423160"/>
+          </a:xfrm>
+          <a:prstGeom prst="rect">
+            <a:avLst/>
+          </a:prstGeom>
+        </p:spPr>
+      </p:pic>
     </p:spTree>
   </p:cSld>
   <p:clrMapOvr>
@@ -4390,6 +4654,30 @@
           </a:p>
         </p:txBody>
       </p:sp>
+      <p:pic>
+        <p:nvPicPr>
+          <p:cNvPr id="4" name="Picture 3" descr="slide_02.jpg"/>
+          <p:cNvPicPr>
+            <a:picLocks noChangeAspect="1"/>
+          </p:cNvPicPr>
+          <p:nvPr/>
+        </p:nvPicPr>
+        <p:blipFill>
+          <a:blip r:embed="rId2"/>
+          <a:stretch>
+            <a:fillRect/>
+          </a:stretch>
+        </p:blipFill>
+        <p:spPr>
+          <a:xfrm>
+            <a:off x="5623560" y="3611880"/>
+            <a:ext cx="3246120" cy="2423160"/>
+          </a:xfrm>
+          <a:prstGeom prst="rect">
+            <a:avLst/>
+          </a:prstGeom>
+        </p:spPr>
+      </p:pic>
     </p:spTree>
   </p:cSld>
   <p:clrMapOvr>
@@ -4500,6 +4788,30 @@
           </a:p>
         </p:txBody>
       </p:sp>
+      <p:pic>
+        <p:nvPicPr>
+          <p:cNvPr id="4" name="Picture 3" descr="slide_05.jpg"/>
+          <p:cNvPicPr>
+            <a:picLocks noChangeAspect="1"/>
+          </p:cNvPicPr>
+          <p:nvPr/>
+        </p:nvPicPr>
+        <p:blipFill>
+          <a:blip r:embed="rId2"/>
+          <a:stretch>
+            <a:fillRect/>
+          </a:stretch>
+        </p:blipFill>
+        <p:spPr>
+          <a:xfrm>
+            <a:off x="5623560" y="3611880"/>
+            <a:ext cx="3246120" cy="2423160"/>
+          </a:xfrm>
+          <a:prstGeom prst="rect">
+            <a:avLst/>
+          </a:prstGeom>
+        </p:spPr>
+      </p:pic>
     </p:spTree>
   </p:cSld>
   <p:clrMapOvr>
@@ -4602,6 +4914,30 @@
           </a:p>
         </p:txBody>
       </p:sp>
+      <p:pic>
+        <p:nvPicPr>
+          <p:cNvPr id="4" name="Picture 3" descr="slide_21.jpg"/>
+          <p:cNvPicPr>
+            <a:picLocks noChangeAspect="1"/>
+          </p:cNvPicPr>
+          <p:nvPr/>
+        </p:nvPicPr>
+        <p:blipFill>
+          <a:blip r:embed="rId2"/>
+          <a:stretch>
+            <a:fillRect/>
+          </a:stretch>
+        </p:blipFill>
+        <p:spPr>
+          <a:xfrm>
+            <a:off x="5623560" y="3611880"/>
+            <a:ext cx="3246120" cy="2423160"/>
+          </a:xfrm>
+          <a:prstGeom prst="rect">
+            <a:avLst/>
+          </a:prstGeom>
+        </p:spPr>
+      </p:pic>
     </p:spTree>
   </p:cSld>
   <p:clrMapOvr>
@@ -4704,6 +5040,30 @@
           </a:p>
         </p:txBody>
       </p:sp>
+      <p:pic>
+        <p:nvPicPr>
+          <p:cNvPr id="4" name="Picture 3" descr="slide_22.jpg"/>
+          <p:cNvPicPr>
+            <a:picLocks noChangeAspect="1"/>
+          </p:cNvPicPr>
+          <p:nvPr/>
+        </p:nvPicPr>
+        <p:blipFill>
+          <a:blip r:embed="rId2"/>
+          <a:stretch>
+            <a:fillRect/>
+          </a:stretch>
+        </p:blipFill>
+        <p:spPr>
+          <a:xfrm>
+            <a:off x="5623560" y="3611880"/>
+            <a:ext cx="3246120" cy="2423160"/>
+          </a:xfrm>
+          <a:prstGeom prst="rect">
+            <a:avLst/>
+          </a:prstGeom>
+        </p:spPr>
+      </p:pic>
     </p:spTree>
   </p:cSld>
   <p:clrMapOvr>
@@ -4798,6 +5158,30 @@
           </a:p>
         </p:txBody>
       </p:sp>
+      <p:pic>
+        <p:nvPicPr>
+          <p:cNvPr id="4" name="Picture 3" descr="slide_02.jpg"/>
+          <p:cNvPicPr>
+            <a:picLocks noChangeAspect="1"/>
+          </p:cNvPicPr>
+          <p:nvPr/>
+        </p:nvPicPr>
+        <p:blipFill>
+          <a:blip r:embed="rId2"/>
+          <a:stretch>
+            <a:fillRect/>
+          </a:stretch>
+        </p:blipFill>
+        <p:spPr>
+          <a:xfrm>
+            <a:off x="5623560" y="3611880"/>
+            <a:ext cx="3246120" cy="2423160"/>
+          </a:xfrm>
+          <a:prstGeom prst="rect">
+            <a:avLst/>
+          </a:prstGeom>
+        </p:spPr>
+      </p:pic>
     </p:spTree>
   </p:cSld>
   <p:clrMapOvr>
@@ -4884,6 +5268,30 @@
           </a:p>
         </p:txBody>
       </p:sp>
+      <p:pic>
+        <p:nvPicPr>
+          <p:cNvPr id="4" name="Picture 3" descr="slide_03.jpg"/>
+          <p:cNvPicPr>
+            <a:picLocks noChangeAspect="1"/>
+          </p:cNvPicPr>
+          <p:nvPr/>
+        </p:nvPicPr>
+        <p:blipFill>
+          <a:blip r:embed="rId2"/>
+          <a:stretch>
+            <a:fillRect/>
+          </a:stretch>
+        </p:blipFill>
+        <p:spPr>
+          <a:xfrm>
+            <a:off x="5623560" y="3611880"/>
+            <a:ext cx="3246120" cy="2423160"/>
+          </a:xfrm>
+          <a:prstGeom prst="rect">
+            <a:avLst/>
+          </a:prstGeom>
+        </p:spPr>
+      </p:pic>
     </p:spTree>
   </p:cSld>
   <p:clrMapOvr>
@@ -4970,6 +5378,30 @@
           </a:p>
         </p:txBody>
       </p:sp>
+      <p:pic>
+        <p:nvPicPr>
+          <p:cNvPr id="4" name="Picture 3" descr="slide_03.jpg"/>
+          <p:cNvPicPr>
+            <a:picLocks noChangeAspect="1"/>
+          </p:cNvPicPr>
+          <p:nvPr/>
+        </p:nvPicPr>
+        <p:blipFill>
+          <a:blip r:embed="rId2"/>
+          <a:stretch>
+            <a:fillRect/>
+          </a:stretch>
+        </p:blipFill>
+        <p:spPr>
+          <a:xfrm>
+            <a:off x="5623560" y="3611880"/>
+            <a:ext cx="3246120" cy="2423160"/>
+          </a:xfrm>
+          <a:prstGeom prst="rect">
+            <a:avLst/>
+          </a:prstGeom>
+        </p:spPr>
+      </p:pic>
     </p:spTree>
   </p:cSld>
   <p:clrMapOvr>
@@ -5056,6 +5488,30 @@
           </a:p>
         </p:txBody>
       </p:sp>
+      <p:pic>
+        <p:nvPicPr>
+          <p:cNvPr id="4" name="Picture 3" descr="slide_01.jpg"/>
+          <p:cNvPicPr>
+            <a:picLocks noChangeAspect="1"/>
+          </p:cNvPicPr>
+          <p:nvPr/>
+        </p:nvPicPr>
+        <p:blipFill>
+          <a:blip r:embed="rId2"/>
+          <a:stretch>
+            <a:fillRect/>
+          </a:stretch>
+        </p:blipFill>
+        <p:spPr>
+          <a:xfrm>
+            <a:off x="5623560" y="3611880"/>
+            <a:ext cx="3246120" cy="2423160"/>
+          </a:xfrm>
+          <a:prstGeom prst="rect">
+            <a:avLst/>
+          </a:prstGeom>
+        </p:spPr>
+      </p:pic>
     </p:spTree>
   </p:cSld>
   <p:clrMapOvr>
@@ -5140,6 +5596,30 @@
           </a:p>
         </p:txBody>
       </p:sp>
+      <p:pic>
+        <p:nvPicPr>
+          <p:cNvPr id="4" name="Picture 3" descr="slide_05.jpg"/>
+          <p:cNvPicPr>
+            <a:picLocks noChangeAspect="1"/>
+          </p:cNvPicPr>
+          <p:nvPr/>
+        </p:nvPicPr>
+        <p:blipFill>
+          <a:blip r:embed="rId2"/>
+          <a:stretch>
+            <a:fillRect/>
+          </a:stretch>
+        </p:blipFill>
+        <p:spPr>
+          <a:xfrm>
+            <a:off x="5623560" y="3611880"/>
+            <a:ext cx="3246120" cy="2423160"/>
+          </a:xfrm>
+          <a:prstGeom prst="rect">
+            <a:avLst/>
+          </a:prstGeom>
+        </p:spPr>
+      </p:pic>
     </p:spTree>
   </p:cSld>
   <p:clrMapOvr>
@@ -5242,6 +5722,30 @@
           </a:p>
         </p:txBody>
       </p:sp>
+      <p:pic>
+        <p:nvPicPr>
+          <p:cNvPr id="4" name="Picture 3" descr="slide_06.jpg"/>
+          <p:cNvPicPr>
+            <a:picLocks noChangeAspect="1"/>
+          </p:cNvPicPr>
+          <p:nvPr/>
+        </p:nvPicPr>
+        <p:blipFill>
+          <a:blip r:embed="rId2"/>
+          <a:stretch>
+            <a:fillRect/>
+          </a:stretch>
+        </p:blipFill>
+        <p:spPr>
+          <a:xfrm>
+            <a:off x="5623560" y="3611880"/>
+            <a:ext cx="3246120" cy="2423160"/>
+          </a:xfrm>
+          <a:prstGeom prst="rect">
+            <a:avLst/>
+          </a:prstGeom>
+        </p:spPr>
+      </p:pic>
     </p:spTree>
   </p:cSld>
   <p:clrMapOvr>
@@ -5328,6 +5832,30 @@
           </a:p>
         </p:txBody>
       </p:sp>
+      <p:pic>
+        <p:nvPicPr>
+          <p:cNvPr id="4" name="Picture 3" descr="slide_07.jpg"/>
+          <p:cNvPicPr>
+            <a:picLocks noChangeAspect="1"/>
+          </p:cNvPicPr>
+          <p:nvPr/>
+        </p:nvPicPr>
+        <p:blipFill>
+          <a:blip r:embed="rId2"/>
+          <a:stretch>
+            <a:fillRect/>
+          </a:stretch>
+        </p:blipFill>
+        <p:spPr>
+          <a:xfrm>
+            <a:off x="5623560" y="3611880"/>
+            <a:ext cx="3246120" cy="2423160"/>
+          </a:xfrm>
+          <a:prstGeom prst="rect">
+            <a:avLst/>
+          </a:prstGeom>
+        </p:spPr>
+      </p:pic>
     </p:spTree>
   </p:cSld>
   <p:clrMapOvr>
@@ -5422,6 +5950,30 @@
           </a:p>
         </p:txBody>
       </p:sp>
+      <p:pic>
+        <p:nvPicPr>
+          <p:cNvPr id="4" name="Picture 3" descr="slide_08.jpg"/>
+          <p:cNvPicPr>
+            <a:picLocks noChangeAspect="1"/>
+          </p:cNvPicPr>
+          <p:nvPr/>
+        </p:nvPicPr>
+        <p:blipFill>
+          <a:blip r:embed="rId2"/>
+          <a:stretch>
+            <a:fillRect/>
+          </a:stretch>
+        </p:blipFill>
+        <p:spPr>
+          <a:xfrm>
+            <a:off x="5623560" y="3611880"/>
+            <a:ext cx="3246120" cy="2423160"/>
+          </a:xfrm>
+          <a:prstGeom prst="rect">
+            <a:avLst/>
+          </a:prstGeom>
+        </p:spPr>
+      </p:pic>
     </p:spTree>
   </p:cSld>
   <p:clrMapOvr>
@@ -5508,6 +6060,30 @@
           </a:p>
         </p:txBody>
       </p:sp>
+      <p:pic>
+        <p:nvPicPr>
+          <p:cNvPr id="4" name="Picture 3" descr="slide_09.jpg"/>
+          <p:cNvPicPr>
+            <a:picLocks noChangeAspect="1"/>
+          </p:cNvPicPr>
+          <p:nvPr/>
+        </p:nvPicPr>
+        <p:blipFill>
+          <a:blip r:embed="rId2"/>
+          <a:stretch>
+            <a:fillRect/>
+          </a:stretch>
+        </p:blipFill>
+        <p:spPr>
+          <a:xfrm>
+            <a:off x="5623560" y="3611880"/>
+            <a:ext cx="3246120" cy="2423160"/>
+          </a:xfrm>
+          <a:prstGeom prst="rect">
+            <a:avLst/>
+          </a:prstGeom>
+        </p:spPr>
+      </p:pic>
     </p:spTree>
   </p:cSld>
   <p:clrMapOvr>

--- a/Presentation/Презентація_Кір_у_дітей.pptx
+++ b/Presentation/Презентація_Кір_у_дітей.pptx
@@ -3308,30 +3308,6 @@
           </a:p>
         </p:txBody>
       </p:sp>
-      <p:pic>
-        <p:nvPicPr>
-          <p:cNvPr id="4" name="Picture 3" descr="slide_01.jpg"/>
-          <p:cNvPicPr>
-            <a:picLocks noChangeAspect="1"/>
-          </p:cNvPicPr>
-          <p:nvPr/>
-        </p:nvPicPr>
-        <p:blipFill>
-          <a:blip r:embed="rId2"/>
-          <a:stretch>
-            <a:fillRect/>
-          </a:stretch>
-        </p:blipFill>
-        <p:spPr>
-          <a:xfrm>
-            <a:off x="5623560" y="3611880"/>
-            <a:ext cx="3246120" cy="2423160"/>
-          </a:xfrm>
-          <a:prstGeom prst="rect">
-            <a:avLst/>
-          </a:prstGeom>
-        </p:spPr>
-      </p:pic>
     </p:spTree>
   </p:cSld>
   <p:clrMapOvr>
@@ -3418,30 +3394,6 @@
           </a:p>
         </p:txBody>
       </p:sp>
-      <p:pic>
-        <p:nvPicPr>
-          <p:cNvPr id="4" name="Picture 3" descr="slide_10.jpg"/>
-          <p:cNvPicPr>
-            <a:picLocks noChangeAspect="1"/>
-          </p:cNvPicPr>
-          <p:nvPr/>
-        </p:nvPicPr>
-        <p:blipFill>
-          <a:blip r:embed="rId2"/>
-          <a:stretch>
-            <a:fillRect/>
-          </a:stretch>
-        </p:blipFill>
-        <p:spPr>
-          <a:xfrm>
-            <a:off x="5623560" y="3611880"/>
-            <a:ext cx="3246120" cy="2423160"/>
-          </a:xfrm>
-          <a:prstGeom prst="rect">
-            <a:avLst/>
-          </a:prstGeom>
-        </p:spPr>
-      </p:pic>
     </p:spTree>
   </p:cSld>
   <p:clrMapOvr>
@@ -3544,30 +3496,6 @@
           </a:p>
         </p:txBody>
       </p:sp>
-      <p:pic>
-        <p:nvPicPr>
-          <p:cNvPr id="4" name="Picture 3" descr="slide_05.jpg"/>
-          <p:cNvPicPr>
-            <a:picLocks noChangeAspect="1"/>
-          </p:cNvPicPr>
-          <p:nvPr/>
-        </p:nvPicPr>
-        <p:blipFill>
-          <a:blip r:embed="rId2"/>
-          <a:stretch>
-            <a:fillRect/>
-          </a:stretch>
-        </p:blipFill>
-        <p:spPr>
-          <a:xfrm>
-            <a:off x="5623560" y="3611880"/>
-            <a:ext cx="3246120" cy="2423160"/>
-          </a:xfrm>
-          <a:prstGeom prst="rect">
-            <a:avLst/>
-          </a:prstGeom>
-        </p:spPr>
-      </p:pic>
     </p:spTree>
   </p:cSld>
   <p:clrMapOvr>
@@ -3666,30 +3594,6 @@
           </a:p>
         </p:txBody>
       </p:sp>
-      <p:pic>
-        <p:nvPicPr>
-          <p:cNvPr id="4" name="Picture 3" descr="slide_06.jpg"/>
-          <p:cNvPicPr>
-            <a:picLocks noChangeAspect="1"/>
-          </p:cNvPicPr>
-          <p:nvPr/>
-        </p:nvPicPr>
-        <p:blipFill>
-          <a:blip r:embed="rId2"/>
-          <a:stretch>
-            <a:fillRect/>
-          </a:stretch>
-        </p:blipFill>
-        <p:spPr>
-          <a:xfrm>
-            <a:off x="5623560" y="3611880"/>
-            <a:ext cx="3246120" cy="2423160"/>
-          </a:xfrm>
-          <a:prstGeom prst="rect">
-            <a:avLst/>
-          </a:prstGeom>
-        </p:spPr>
-      </p:pic>
     </p:spTree>
   </p:cSld>
   <p:clrMapOvr>
@@ -3784,30 +3688,6 @@
           </a:p>
         </p:txBody>
       </p:sp>
-      <p:pic>
-        <p:nvPicPr>
-          <p:cNvPr id="4" name="Picture 3" descr="slide_13.jpg"/>
-          <p:cNvPicPr>
-            <a:picLocks noChangeAspect="1"/>
-          </p:cNvPicPr>
-          <p:nvPr/>
-        </p:nvPicPr>
-        <p:blipFill>
-          <a:blip r:embed="rId2"/>
-          <a:stretch>
-            <a:fillRect/>
-          </a:stretch>
-        </p:blipFill>
-        <p:spPr>
-          <a:xfrm>
-            <a:off x="5623560" y="3611880"/>
-            <a:ext cx="3246120" cy="2423160"/>
-          </a:xfrm>
-          <a:prstGeom prst="rect">
-            <a:avLst/>
-          </a:prstGeom>
-        </p:spPr>
-      </p:pic>
     </p:spTree>
   </p:cSld>
   <p:clrMapOvr>
@@ -3908,30 +3788,6 @@
           </a:p>
         </p:txBody>
       </p:sp>
-      <p:pic>
-        <p:nvPicPr>
-          <p:cNvPr id="4" name="Picture 3" descr="slide_14.jpg"/>
-          <p:cNvPicPr>
-            <a:picLocks noChangeAspect="1"/>
-          </p:cNvPicPr>
-          <p:nvPr/>
-        </p:nvPicPr>
-        <p:blipFill>
-          <a:blip r:embed="rId2"/>
-          <a:stretch>
-            <a:fillRect/>
-          </a:stretch>
-        </p:blipFill>
-        <p:spPr>
-          <a:xfrm>
-            <a:off x="5623560" y="3611880"/>
-            <a:ext cx="3246120" cy="2423160"/>
-          </a:xfrm>
-          <a:prstGeom prst="rect">
-            <a:avLst/>
-          </a:prstGeom>
-        </p:spPr>
-      </p:pic>
     </p:spTree>
   </p:cSld>
   <p:clrMapOvr>
@@ -4026,30 +3882,6 @@
           </a:p>
         </p:txBody>
       </p:sp>
-      <p:pic>
-        <p:nvPicPr>
-          <p:cNvPr id="4" name="Picture 3" descr="slide_15.jpg"/>
-          <p:cNvPicPr>
-            <a:picLocks noChangeAspect="1"/>
-          </p:cNvPicPr>
-          <p:nvPr/>
-        </p:nvPicPr>
-        <p:blipFill>
-          <a:blip r:embed="rId2"/>
-          <a:stretch>
-            <a:fillRect/>
-          </a:stretch>
-        </p:blipFill>
-        <p:spPr>
-          <a:xfrm>
-            <a:off x="5623560" y="3611880"/>
-            <a:ext cx="3246120" cy="2423160"/>
-          </a:xfrm>
-          <a:prstGeom prst="rect">
-            <a:avLst/>
-          </a:prstGeom>
-        </p:spPr>
-      </p:pic>
     </p:spTree>
   </p:cSld>
   <p:clrMapOvr>
@@ -4158,30 +3990,6 @@
           </a:p>
         </p:txBody>
       </p:sp>
-      <p:pic>
-        <p:nvPicPr>
-          <p:cNvPr id="4" name="Picture 3" descr="slide_13.jpg"/>
-          <p:cNvPicPr>
-            <a:picLocks noChangeAspect="1"/>
-          </p:cNvPicPr>
-          <p:nvPr/>
-        </p:nvPicPr>
-        <p:blipFill>
-          <a:blip r:embed="rId2"/>
-          <a:stretch>
-            <a:fillRect/>
-          </a:stretch>
-        </p:blipFill>
-        <p:spPr>
-          <a:xfrm>
-            <a:off x="5623560" y="3611880"/>
-            <a:ext cx="3246120" cy="2423160"/>
-          </a:xfrm>
-          <a:prstGeom prst="rect">
-            <a:avLst/>
-          </a:prstGeom>
-        </p:spPr>
-      </p:pic>
     </p:spTree>
   </p:cSld>
   <p:clrMapOvr>
@@ -4292,30 +4100,6 @@
           </a:p>
         </p:txBody>
       </p:sp>
-      <p:pic>
-        <p:nvPicPr>
-          <p:cNvPr id="4" name="Picture 3" descr="slide_17.jpg"/>
-          <p:cNvPicPr>
-            <a:picLocks noChangeAspect="1"/>
-          </p:cNvPicPr>
-          <p:nvPr/>
-        </p:nvPicPr>
-        <p:blipFill>
-          <a:blip r:embed="rId2"/>
-          <a:stretch>
-            <a:fillRect/>
-          </a:stretch>
-        </p:blipFill>
-        <p:spPr>
-          <a:xfrm>
-            <a:off x="5623560" y="3611880"/>
-            <a:ext cx="3246120" cy="2423160"/>
-          </a:xfrm>
-          <a:prstGeom prst="rect">
-            <a:avLst/>
-          </a:prstGeom>
-        </p:spPr>
-      </p:pic>
     </p:spTree>
   </p:cSld>
   <p:clrMapOvr>
@@ -4418,30 +4202,6 @@
           </a:p>
         </p:txBody>
       </p:sp>
-      <p:pic>
-        <p:nvPicPr>
-          <p:cNvPr id="4" name="Picture 3" descr="slide_03.jpg"/>
-          <p:cNvPicPr>
-            <a:picLocks noChangeAspect="1"/>
-          </p:cNvPicPr>
-          <p:nvPr/>
-        </p:nvPicPr>
-        <p:blipFill>
-          <a:blip r:embed="rId2"/>
-          <a:stretch>
-            <a:fillRect/>
-          </a:stretch>
-        </p:blipFill>
-        <p:spPr>
-          <a:xfrm>
-            <a:off x="5623560" y="3611880"/>
-            <a:ext cx="3246120" cy="2423160"/>
-          </a:xfrm>
-          <a:prstGeom prst="rect">
-            <a:avLst/>
-          </a:prstGeom>
-        </p:spPr>
-      </p:pic>
     </p:spTree>
   </p:cSld>
   <p:clrMapOvr>
@@ -4536,30 +4296,6 @@
           </a:p>
         </p:txBody>
       </p:sp>
-      <p:pic>
-        <p:nvPicPr>
-          <p:cNvPr id="4" name="Picture 3" descr="slide_19.jpg"/>
-          <p:cNvPicPr>
-            <a:picLocks noChangeAspect="1"/>
-          </p:cNvPicPr>
-          <p:nvPr/>
-        </p:nvPicPr>
-        <p:blipFill>
-          <a:blip r:embed="rId2"/>
-          <a:stretch>
-            <a:fillRect/>
-          </a:stretch>
-        </p:blipFill>
-        <p:spPr>
-          <a:xfrm>
-            <a:off x="5623560" y="3611880"/>
-            <a:ext cx="3246120" cy="2423160"/>
-          </a:xfrm>
-          <a:prstGeom prst="rect">
-            <a:avLst/>
-          </a:prstGeom>
-        </p:spPr>
-      </p:pic>
     </p:spTree>
   </p:cSld>
   <p:clrMapOvr>
@@ -4654,30 +4390,6 @@
           </a:p>
         </p:txBody>
       </p:sp>
-      <p:pic>
-        <p:nvPicPr>
-          <p:cNvPr id="4" name="Picture 3" descr="slide_02.jpg"/>
-          <p:cNvPicPr>
-            <a:picLocks noChangeAspect="1"/>
-          </p:cNvPicPr>
-          <p:nvPr/>
-        </p:nvPicPr>
-        <p:blipFill>
-          <a:blip r:embed="rId2"/>
-          <a:stretch>
-            <a:fillRect/>
-          </a:stretch>
-        </p:blipFill>
-        <p:spPr>
-          <a:xfrm>
-            <a:off x="5623560" y="3611880"/>
-            <a:ext cx="3246120" cy="2423160"/>
-          </a:xfrm>
-          <a:prstGeom prst="rect">
-            <a:avLst/>
-          </a:prstGeom>
-        </p:spPr>
-      </p:pic>
     </p:spTree>
   </p:cSld>
   <p:clrMapOvr>
@@ -4788,30 +4500,6 @@
           </a:p>
         </p:txBody>
       </p:sp>
-      <p:pic>
-        <p:nvPicPr>
-          <p:cNvPr id="4" name="Picture 3" descr="slide_05.jpg"/>
-          <p:cNvPicPr>
-            <a:picLocks noChangeAspect="1"/>
-          </p:cNvPicPr>
-          <p:nvPr/>
-        </p:nvPicPr>
-        <p:blipFill>
-          <a:blip r:embed="rId2"/>
-          <a:stretch>
-            <a:fillRect/>
-          </a:stretch>
-        </p:blipFill>
-        <p:spPr>
-          <a:xfrm>
-            <a:off x="5623560" y="3611880"/>
-            <a:ext cx="3246120" cy="2423160"/>
-          </a:xfrm>
-          <a:prstGeom prst="rect">
-            <a:avLst/>
-          </a:prstGeom>
-        </p:spPr>
-      </p:pic>
     </p:spTree>
   </p:cSld>
   <p:clrMapOvr>
@@ -4914,30 +4602,6 @@
           </a:p>
         </p:txBody>
       </p:sp>
-      <p:pic>
-        <p:nvPicPr>
-          <p:cNvPr id="4" name="Picture 3" descr="slide_21.jpg"/>
-          <p:cNvPicPr>
-            <a:picLocks noChangeAspect="1"/>
-          </p:cNvPicPr>
-          <p:nvPr/>
-        </p:nvPicPr>
-        <p:blipFill>
-          <a:blip r:embed="rId2"/>
-          <a:stretch>
-            <a:fillRect/>
-          </a:stretch>
-        </p:blipFill>
-        <p:spPr>
-          <a:xfrm>
-            <a:off x="5623560" y="3611880"/>
-            <a:ext cx="3246120" cy="2423160"/>
-          </a:xfrm>
-          <a:prstGeom prst="rect">
-            <a:avLst/>
-          </a:prstGeom>
-        </p:spPr>
-      </p:pic>
     </p:spTree>
   </p:cSld>
   <p:clrMapOvr>
@@ -5040,30 +4704,6 @@
           </a:p>
         </p:txBody>
       </p:sp>
-      <p:pic>
-        <p:nvPicPr>
-          <p:cNvPr id="4" name="Picture 3" descr="slide_22.jpg"/>
-          <p:cNvPicPr>
-            <a:picLocks noChangeAspect="1"/>
-          </p:cNvPicPr>
-          <p:nvPr/>
-        </p:nvPicPr>
-        <p:blipFill>
-          <a:blip r:embed="rId2"/>
-          <a:stretch>
-            <a:fillRect/>
-          </a:stretch>
-        </p:blipFill>
-        <p:spPr>
-          <a:xfrm>
-            <a:off x="5623560" y="3611880"/>
-            <a:ext cx="3246120" cy="2423160"/>
-          </a:xfrm>
-          <a:prstGeom prst="rect">
-            <a:avLst/>
-          </a:prstGeom>
-        </p:spPr>
-      </p:pic>
     </p:spTree>
   </p:cSld>
   <p:clrMapOvr>
@@ -5158,30 +4798,6 @@
           </a:p>
         </p:txBody>
       </p:sp>
-      <p:pic>
-        <p:nvPicPr>
-          <p:cNvPr id="4" name="Picture 3" descr="slide_02.jpg"/>
-          <p:cNvPicPr>
-            <a:picLocks noChangeAspect="1"/>
-          </p:cNvPicPr>
-          <p:nvPr/>
-        </p:nvPicPr>
-        <p:blipFill>
-          <a:blip r:embed="rId2"/>
-          <a:stretch>
-            <a:fillRect/>
-          </a:stretch>
-        </p:blipFill>
-        <p:spPr>
-          <a:xfrm>
-            <a:off x="5623560" y="3611880"/>
-            <a:ext cx="3246120" cy="2423160"/>
-          </a:xfrm>
-          <a:prstGeom prst="rect">
-            <a:avLst/>
-          </a:prstGeom>
-        </p:spPr>
-      </p:pic>
     </p:spTree>
   </p:cSld>
   <p:clrMapOvr>
@@ -5268,30 +4884,6 @@
           </a:p>
         </p:txBody>
       </p:sp>
-      <p:pic>
-        <p:nvPicPr>
-          <p:cNvPr id="4" name="Picture 3" descr="slide_03.jpg"/>
-          <p:cNvPicPr>
-            <a:picLocks noChangeAspect="1"/>
-          </p:cNvPicPr>
-          <p:nvPr/>
-        </p:nvPicPr>
-        <p:blipFill>
-          <a:blip r:embed="rId2"/>
-          <a:stretch>
-            <a:fillRect/>
-          </a:stretch>
-        </p:blipFill>
-        <p:spPr>
-          <a:xfrm>
-            <a:off x="5623560" y="3611880"/>
-            <a:ext cx="3246120" cy="2423160"/>
-          </a:xfrm>
-          <a:prstGeom prst="rect">
-            <a:avLst/>
-          </a:prstGeom>
-        </p:spPr>
-      </p:pic>
     </p:spTree>
   </p:cSld>
   <p:clrMapOvr>
@@ -5378,30 +4970,6 @@
           </a:p>
         </p:txBody>
       </p:sp>
-      <p:pic>
-        <p:nvPicPr>
-          <p:cNvPr id="4" name="Picture 3" descr="slide_03.jpg"/>
-          <p:cNvPicPr>
-            <a:picLocks noChangeAspect="1"/>
-          </p:cNvPicPr>
-          <p:nvPr/>
-        </p:nvPicPr>
-        <p:blipFill>
-          <a:blip r:embed="rId2"/>
-          <a:stretch>
-            <a:fillRect/>
-          </a:stretch>
-        </p:blipFill>
-        <p:spPr>
-          <a:xfrm>
-            <a:off x="5623560" y="3611880"/>
-            <a:ext cx="3246120" cy="2423160"/>
-          </a:xfrm>
-          <a:prstGeom prst="rect">
-            <a:avLst/>
-          </a:prstGeom>
-        </p:spPr>
-      </p:pic>
     </p:spTree>
   </p:cSld>
   <p:clrMapOvr>
@@ -5488,30 +5056,6 @@
           </a:p>
         </p:txBody>
       </p:sp>
-      <p:pic>
-        <p:nvPicPr>
-          <p:cNvPr id="4" name="Picture 3" descr="slide_01.jpg"/>
-          <p:cNvPicPr>
-            <a:picLocks noChangeAspect="1"/>
-          </p:cNvPicPr>
-          <p:nvPr/>
-        </p:nvPicPr>
-        <p:blipFill>
-          <a:blip r:embed="rId2"/>
-          <a:stretch>
-            <a:fillRect/>
-          </a:stretch>
-        </p:blipFill>
-        <p:spPr>
-          <a:xfrm>
-            <a:off x="5623560" y="3611880"/>
-            <a:ext cx="3246120" cy="2423160"/>
-          </a:xfrm>
-          <a:prstGeom prst="rect">
-            <a:avLst/>
-          </a:prstGeom>
-        </p:spPr>
-      </p:pic>
     </p:spTree>
   </p:cSld>
   <p:clrMapOvr>
@@ -5596,30 +5140,6 @@
           </a:p>
         </p:txBody>
       </p:sp>
-      <p:pic>
-        <p:nvPicPr>
-          <p:cNvPr id="4" name="Picture 3" descr="slide_05.jpg"/>
-          <p:cNvPicPr>
-            <a:picLocks noChangeAspect="1"/>
-          </p:cNvPicPr>
-          <p:nvPr/>
-        </p:nvPicPr>
-        <p:blipFill>
-          <a:blip r:embed="rId2"/>
-          <a:stretch>
-            <a:fillRect/>
-          </a:stretch>
-        </p:blipFill>
-        <p:spPr>
-          <a:xfrm>
-            <a:off x="5623560" y="3611880"/>
-            <a:ext cx="3246120" cy="2423160"/>
-          </a:xfrm>
-          <a:prstGeom prst="rect">
-            <a:avLst/>
-          </a:prstGeom>
-        </p:spPr>
-      </p:pic>
     </p:spTree>
   </p:cSld>
   <p:clrMapOvr>
@@ -5722,30 +5242,6 @@
           </a:p>
         </p:txBody>
       </p:sp>
-      <p:pic>
-        <p:nvPicPr>
-          <p:cNvPr id="4" name="Picture 3" descr="slide_06.jpg"/>
-          <p:cNvPicPr>
-            <a:picLocks noChangeAspect="1"/>
-          </p:cNvPicPr>
-          <p:nvPr/>
-        </p:nvPicPr>
-        <p:blipFill>
-          <a:blip r:embed="rId2"/>
-          <a:stretch>
-            <a:fillRect/>
-          </a:stretch>
-        </p:blipFill>
-        <p:spPr>
-          <a:xfrm>
-            <a:off x="5623560" y="3611880"/>
-            <a:ext cx="3246120" cy="2423160"/>
-          </a:xfrm>
-          <a:prstGeom prst="rect">
-            <a:avLst/>
-          </a:prstGeom>
-        </p:spPr>
-      </p:pic>
     </p:spTree>
   </p:cSld>
   <p:clrMapOvr>
@@ -5832,30 +5328,6 @@
           </a:p>
         </p:txBody>
       </p:sp>
-      <p:pic>
-        <p:nvPicPr>
-          <p:cNvPr id="4" name="Picture 3" descr="slide_07.jpg"/>
-          <p:cNvPicPr>
-            <a:picLocks noChangeAspect="1"/>
-          </p:cNvPicPr>
-          <p:nvPr/>
-        </p:nvPicPr>
-        <p:blipFill>
-          <a:blip r:embed="rId2"/>
-          <a:stretch>
-            <a:fillRect/>
-          </a:stretch>
-        </p:blipFill>
-        <p:spPr>
-          <a:xfrm>
-            <a:off x="5623560" y="3611880"/>
-            <a:ext cx="3246120" cy="2423160"/>
-          </a:xfrm>
-          <a:prstGeom prst="rect">
-            <a:avLst/>
-          </a:prstGeom>
-        </p:spPr>
-      </p:pic>
     </p:spTree>
   </p:cSld>
   <p:clrMapOvr>
@@ -5950,30 +5422,6 @@
           </a:p>
         </p:txBody>
       </p:sp>
-      <p:pic>
-        <p:nvPicPr>
-          <p:cNvPr id="4" name="Picture 3" descr="slide_08.jpg"/>
-          <p:cNvPicPr>
-            <a:picLocks noChangeAspect="1"/>
-          </p:cNvPicPr>
-          <p:nvPr/>
-        </p:nvPicPr>
-        <p:blipFill>
-          <a:blip r:embed="rId2"/>
-          <a:stretch>
-            <a:fillRect/>
-          </a:stretch>
-        </p:blipFill>
-        <p:spPr>
-          <a:xfrm>
-            <a:off x="5623560" y="3611880"/>
-            <a:ext cx="3246120" cy="2423160"/>
-          </a:xfrm>
-          <a:prstGeom prst="rect">
-            <a:avLst/>
-          </a:prstGeom>
-        </p:spPr>
-      </p:pic>
     </p:spTree>
   </p:cSld>
   <p:clrMapOvr>
@@ -6060,30 +5508,6 @@
           </a:p>
         </p:txBody>
       </p:sp>
-      <p:pic>
-        <p:nvPicPr>
-          <p:cNvPr id="4" name="Picture 3" descr="slide_09.jpg"/>
-          <p:cNvPicPr>
-            <a:picLocks noChangeAspect="1"/>
-          </p:cNvPicPr>
-          <p:nvPr/>
-        </p:nvPicPr>
-        <p:blipFill>
-          <a:blip r:embed="rId2"/>
-          <a:stretch>
-            <a:fillRect/>
-          </a:stretch>
-        </p:blipFill>
-        <p:spPr>
-          <a:xfrm>
-            <a:off x="5623560" y="3611880"/>
-            <a:ext cx="3246120" cy="2423160"/>
-          </a:xfrm>
-          <a:prstGeom prst="rect">
-            <a:avLst/>
-          </a:prstGeom>
-        </p:spPr>
-      </p:pic>
     </p:spTree>
   </p:cSld>
   <p:clrMapOvr>
